--- a/水之明销售介绍.pptx
+++ b/水之明销售介绍.pptx
@@ -19531,7 +19531,7 @@
         <p:spPr>
           <a:xfrm>
             <a:off x="365760" y="3383280"/>
-            <a:ext cx="2011680" cy="228600"/>
+            <a:ext cx="2712720" cy="228600"/>
           </a:xfrm>
           <a:prstGeom prst="rect">
             <a:avLst/>
@@ -19570,7 +19570,7 @@
         <p:spPr>
           <a:xfrm>
             <a:off x="365760" y="3657600"/>
-            <a:ext cx="2011680" cy="457200"/>
+            <a:ext cx="2712720" cy="457200"/>
           </a:xfrm>
           <a:prstGeom prst="rect">
             <a:avLst/>
@@ -19586,7 +19586,7 @@
               <a:buNone/>
             </a:pPr>
             <a:r>
-              <a:rPr lang="en-US" sz="1300" b="1" dirty="0">
+              <a:rPr lang="en-US" sz="1500" b="1" dirty="0">
                 <a:solidFill>
                   <a:srgbClr val="F6F2E9"/>
                 </a:solidFill>
@@ -19594,9 +19594,9 @@
                 <a:ea typeface="Songti SC" pitchFamily="34" charset="-122"/>
                 <a:cs typeface="Songti SC" pitchFamily="34" charset="-120"/>
               </a:rPr>
-              <a:t>service@shuizhiming.com</a:t>
-            </a:r>
-            <a:endParaRPr lang="en-US" sz="1300" dirty="0"/>
+              <a:t>3657797258@QQ.com</a:t>
+            </a:r>
+            <a:endParaRPr lang="en-US" sz="1500" dirty="0"/>
           </a:p>
         </p:txBody>
       </p:sp>
@@ -19608,7 +19608,7 @@
         </p:nvSpPr>
         <p:spPr>
           <a:xfrm>
-            <a:off x="2377440" y="3474720"/>
+            <a:off x="3124200" y="3474720"/>
             <a:ext cx="0" cy="640080"/>
           </a:xfrm>
           <a:prstGeom prst="line">
@@ -19631,8 +19631,8 @@
         </p:nvSpPr>
         <p:spPr>
           <a:xfrm>
-            <a:off x="2468880" y="3383280"/>
-            <a:ext cx="2011680" cy="228600"/>
+            <a:off x="3169920" y="3383280"/>
+            <a:ext cx="2712720" cy="228600"/>
           </a:xfrm>
           <a:prstGeom prst="rect">
             <a:avLst/>
@@ -19670,8 +19670,8 @@
         </p:nvSpPr>
         <p:spPr>
           <a:xfrm>
-            <a:off x="2468880" y="3657600"/>
-            <a:ext cx="2011680" cy="457200"/>
+            <a:off x="3169920" y="3657600"/>
+            <a:ext cx="2712720" cy="457200"/>
           </a:xfrm>
           <a:prstGeom prst="rect">
             <a:avLst/>
@@ -19687,7 +19687,7 @@
               <a:buNone/>
             </a:pPr>
             <a:r>
-              <a:rPr lang="en-US" sz="1300" b="1" dirty="0">
+              <a:rPr lang="en-US" sz="1500" b="1" dirty="0">
                 <a:solidFill>
                   <a:srgbClr val="F6F2E9"/>
                 </a:solidFill>
@@ -19695,9 +19695,9 @@
                 <a:ea typeface="Songti SC" pitchFamily="34" charset="-122"/>
                 <a:cs typeface="Songti SC" pitchFamily="34" charset="-120"/>
               </a:rPr>
-              <a:t>400 - XXX - XXXX</a:t>
-            </a:r>
-            <a:endParaRPr lang="en-US" sz="1300" dirty="0"/>
+              <a:t>13916498860</a:t>
+            </a:r>
+            <a:endParaRPr lang="en-US" sz="1500" dirty="0"/>
           </a:p>
         </p:txBody>
       </p:sp>
@@ -19709,7 +19709,7 @@
         </p:nvSpPr>
         <p:spPr>
           <a:xfrm>
-            <a:off x="4480560" y="3474720"/>
+            <a:off x="5928360" y="3474720"/>
             <a:ext cx="0" cy="640080"/>
           </a:xfrm>
           <a:prstGeom prst="line">
@@ -19732,8 +19732,8 @@
         </p:nvSpPr>
         <p:spPr>
           <a:xfrm>
-            <a:off x="4572000" y="3383280"/>
-            <a:ext cx="2011680" cy="228600"/>
+            <a:off x="5974080" y="3383280"/>
+            <a:ext cx="2712720" cy="228600"/>
           </a:xfrm>
           <a:prstGeom prst="rect">
             <a:avLst/>
@@ -19771,8 +19771,8 @@
         </p:nvSpPr>
         <p:spPr>
           <a:xfrm>
-            <a:off x="4572000" y="3657600"/>
-            <a:ext cx="2011680" cy="457200"/>
+            <a:off x="5974080" y="3657600"/>
+            <a:ext cx="2712720" cy="457200"/>
           </a:xfrm>
           <a:prstGeom prst="rect">
             <a:avLst/>
@@ -19788,7 +19788,7 @@
               <a:buNone/>
             </a:pPr>
             <a:r>
-              <a:rPr lang="en-US" sz="1300" b="1" dirty="0">
+              <a:rPr lang="en-US" sz="1500" b="1" dirty="0">
                 <a:solidFill>
                   <a:srgbClr val="F6F2E9"/>
                 </a:solidFill>
@@ -19798,7 +19798,7 @@
               </a:rPr>
               <a:t>周一至周五  09:00 – 18:00</a:t>
             </a:r>
-            <a:endParaRPr lang="en-US" sz="1300" dirty="0"/>
+            <a:endParaRPr lang="en-US" sz="1500" dirty="0"/>
           </a:p>
         </p:txBody>
       </p:sp>
@@ -19810,8 +19810,8 @@
         </p:nvSpPr>
         <p:spPr>
           <a:xfrm>
-            <a:off x="6583680" y="3474720"/>
-            <a:ext cx="0" cy="640080"/>
+            <a:off x="365760" y="4572000"/>
+            <a:ext cx="8412480" cy="0"/>
           </a:xfrm>
           <a:prstGeom prst="line">
             <a:avLst/>
@@ -19833,8 +19833,8 @@
         </p:nvSpPr>
         <p:spPr>
           <a:xfrm>
-            <a:off x="6675120" y="3383280"/>
-            <a:ext cx="2011680" cy="228600"/>
+            <a:off x="365760" y="4709160"/>
+            <a:ext cx="5486400" cy="274320"/>
           </a:xfrm>
           <a:prstGeom prst="rect">
             <a:avLst/>
@@ -19850,115 +19850,14 @@
               <a:buNone/>
             </a:pPr>
             <a:r>
-              <a:rPr lang="en-US" sz="900" spc="300" kern="0" dirty="0">
+              <a:rPr lang="en-US" sz="1000" spc="400" kern="0" dirty="0">
                 <a:solidFill>
                   <a:srgbClr val="888888"/>
-                </a:solidFill>
-                <a:latin typeface="Menlo" pitchFamily="34" charset="0"/>
-                <a:ea typeface="Menlo" pitchFamily="34" charset="-122"/>
-                <a:cs typeface="Menlo" pitchFamily="34" charset="-120"/>
-              </a:rPr>
-              <a:t>公司地址</a:t>
-            </a:r>
-            <a:endParaRPr lang="en-US" sz="900" dirty="0"/>
-          </a:p>
-        </p:txBody>
-      </p:sp>
-      <p:sp>
-        <p:nvSpPr>
-          <p:cNvPr id="19" name="Text 17"/>
-          <p:cNvSpPr/>
-          <p:nvPr/>
-        </p:nvSpPr>
-        <p:spPr>
-          <a:xfrm>
-            <a:off x="6675120" y="3657600"/>
-            <a:ext cx="2011680" cy="457200"/>
-          </a:xfrm>
-          <a:prstGeom prst="rect">
-            <a:avLst/>
-          </a:prstGeom>
-          <a:noFill/>
-          <a:ln/>
-        </p:spPr>
-        <p:txBody>
-          <a:bodyPr wrap="square" lIns="0" tIns="0" rIns="0" bIns="0" rtlCol="0" anchor="ctr"/>
-          <a:lstStyle/>
-          <a:p>
-            <a:pPr indent="0" marL="0">
-              <a:buNone/>
-            </a:pPr>
-            <a:r>
-              <a:rPr lang="en-US" sz="1300" b="1" dirty="0">
-                <a:solidFill>
-                  <a:srgbClr val="F6F2E9"/>
                 </a:solidFill>
                 <a:latin typeface="Songti SC" pitchFamily="34" charset="0"/>
                 <a:ea typeface="Songti SC" pitchFamily="34" charset="-122"/>
                 <a:cs typeface="Songti SC" pitchFamily="34" charset="-120"/>
               </a:rPr>
-              <a:t>上海市 XX 区 XX 路 XX 号</a:t>
-            </a:r>
-            <a:endParaRPr lang="en-US" sz="1300" dirty="0"/>
-          </a:p>
-        </p:txBody>
-      </p:sp>
-      <p:sp>
-        <p:nvSpPr>
-          <p:cNvPr id="20" name="Shape 18"/>
-          <p:cNvSpPr/>
-          <p:nvPr/>
-        </p:nvSpPr>
-        <p:spPr>
-          <a:xfrm>
-            <a:off x="365760" y="4572000"/>
-            <a:ext cx="8412480" cy="0"/>
-          </a:xfrm>
-          <a:prstGeom prst="line">
-            <a:avLst/>
-          </a:prstGeom>
-          <a:noFill/>
-          <a:ln w="6350">
-            <a:solidFill>
-              <a:srgbClr val="444444"/>
-            </a:solidFill>
-            <a:prstDash val="solid"/>
-          </a:ln>
-        </p:spPr>
-      </p:sp>
-      <p:sp>
-        <p:nvSpPr>
-          <p:cNvPr id="21" name="Text 19"/>
-          <p:cNvSpPr/>
-          <p:nvPr/>
-        </p:nvSpPr>
-        <p:spPr>
-          <a:xfrm>
-            <a:off x="365760" y="4709160"/>
-            <a:ext cx="5486400" cy="274320"/>
-          </a:xfrm>
-          <a:prstGeom prst="rect">
-            <a:avLst/>
-          </a:prstGeom>
-          <a:noFill/>
-          <a:ln/>
-        </p:spPr>
-        <p:txBody>
-          <a:bodyPr wrap="square" lIns="0" tIns="0" rIns="0" bIns="0" rtlCol="0" anchor="ctr"/>
-          <a:lstStyle/>
-          <a:p>
-            <a:pPr indent="0" marL="0">
-              <a:buNone/>
-            </a:pPr>
-            <a:r>
-              <a:rPr lang="en-US" sz="1000" spc="400" kern="0" dirty="0">
-                <a:solidFill>
-                  <a:srgbClr val="888888"/>
-                </a:solidFill>
-                <a:latin typeface="Songti SC" pitchFamily="34" charset="0"/>
-                <a:ea typeface="Songti SC" pitchFamily="34" charset="-122"/>
-                <a:cs typeface="Songti SC" pitchFamily="34" charset="-120"/>
-              </a:rPr>
               <a:t>上 海 水 之 明 科 技 有 限 公 司</a:t>
             </a:r>
             <a:endParaRPr lang="en-US" sz="1000" dirty="0"/>
@@ -19967,7 +19866,7 @@
       </p:sp>
       <p:sp>
         <p:nvSpPr>
-          <p:cNvPr id="22" name="Text 20"/>
+          <p:cNvPr id="19" name="Text 17"/>
           <p:cNvSpPr/>
           <p:nvPr/>
         </p:nvSpPr>

--- a/水之明销售介绍.pptx
+++ b/水之明销售介绍.pptx
@@ -5828,8 +5828,8 @@
         </p:nvSpPr>
         <p:spPr>
           <a:xfrm>
-            <a:off x="365760" y="4572000"/>
-            <a:ext cx="8412480" cy="365760"/>
+            <a:off x="365760" y="4297680"/>
+            <a:ext cx="8412480" cy="320040"/>
           </a:xfrm>
           <a:prstGeom prst="rect">
             <a:avLst/>
@@ -5848,8 +5848,8 @@
         </p:nvSpPr>
         <p:spPr>
           <a:xfrm>
-            <a:off x="548640" y="4617720"/>
-            <a:ext cx="8046720" cy="274320"/>
+            <a:off x="548640" y="4297680"/>
+            <a:ext cx="8046720" cy="320040"/>
           </a:xfrm>
           <a:prstGeom prst="rect">
             <a:avLst/>
@@ -7590,7 +7590,7 @@
               <a:buNone/>
             </a:pPr>
             <a:r>
-              <a:rPr lang="en-US" sz="4600" b="1" dirty="0">
+              <a:rPr lang="en-US" sz="3800" b="1" dirty="0">
                 <a:solidFill>
                   <a:srgbClr val="0B3D4F"/>
                 </a:solidFill>
@@ -7600,7 +7600,7 @@
               </a:rPr>
               <a:t>600+</a:t>
             </a:r>
-            <a:endParaRPr lang="en-US" sz="4600" dirty="0"/>
+            <a:endParaRPr lang="en-US" sz="3800" dirty="0"/>
           </a:p>
         </p:txBody>
       </p:sp>
@@ -7752,7 +7752,7 @@
               <a:buNone/>
             </a:pPr>
             <a:r>
-              <a:rPr lang="en-US" sz="4600" b="1" dirty="0">
+              <a:rPr lang="en-US" sz="3800" b="1" dirty="0">
                 <a:solidFill>
                   <a:srgbClr val="0B3D4F"/>
                 </a:solidFill>
@@ -7762,7 +7762,7 @@
               </a:rPr>
               <a:t>78%</a:t>
             </a:r>
-            <a:endParaRPr lang="en-US" sz="4600" dirty="0"/>
+            <a:endParaRPr lang="en-US" sz="3800" dirty="0"/>
           </a:p>
         </p:txBody>
       </p:sp>
@@ -7914,7 +7914,7 @@
               <a:buNone/>
             </a:pPr>
             <a:r>
-              <a:rPr lang="en-US" sz="4600" b="1" dirty="0">
+              <a:rPr lang="en-US" sz="3800" b="1" dirty="0">
                 <a:solidFill>
                   <a:srgbClr val="0B3D4F"/>
                 </a:solidFill>
@@ -7922,9 +7922,9 @@
                 <a:ea typeface="Songti SC" pitchFamily="34" charset="-122"/>
                 <a:cs typeface="Songti SC" pitchFamily="34" charset="-120"/>
               </a:rPr>
-              <a:t>¥1.2亿+</a:t>
-            </a:r>
-            <a:endParaRPr lang="en-US" sz="4600" dirty="0"/>
+              <a:t>¥1.2亿</a:t>
+            </a:r>
+            <a:endParaRPr lang="en-US" sz="3800" dirty="0"/>
           </a:p>
         </p:txBody>
       </p:sp>
@@ -8076,7 +8076,7 @@
               <a:buNone/>
             </a:pPr>
             <a:r>
-              <a:rPr lang="en-US" sz="4600" b="1" dirty="0">
+              <a:rPr lang="en-US" sz="3800" b="1" dirty="0">
                 <a:solidFill>
                   <a:srgbClr val="0B3D4F"/>
                 </a:solidFill>
@@ -8086,7 +8086,7 @@
               </a:rPr>
               <a:t>4.9</a:t>
             </a:r>
-            <a:endParaRPr lang="en-US" sz="4600" dirty="0"/>
+            <a:endParaRPr lang="en-US" sz="3800" dirty="0"/>
           </a:p>
         </p:txBody>
       </p:sp>
@@ -11008,7 +11008,7 @@
                 <a:ea typeface="Menlo" pitchFamily="34" charset="-122"/>
                 <a:cs typeface="Menlo" pitchFamily="34" charset="-120"/>
               </a:rPr>
-              <a:t>PART VI  ·  DECISION TOOL  ·  决策工具</a:t>
+              <a:t>DECISION TOOL  ·  决策工具</a:t>
             </a:r>
             <a:endParaRPr lang="en-US" sz="900" dirty="0"/>
           </a:p>
@@ -12924,8 +12924,8 @@
         </p:nvSpPr>
         <p:spPr>
           <a:xfrm>
-            <a:off x="365760" y="2194560"/>
-            <a:ext cx="8412480" cy="777240"/>
+            <a:off x="365760" y="2057400"/>
+            <a:ext cx="8412480" cy="713232"/>
           </a:xfrm>
           <a:prstGeom prst="rect">
             <a:avLst/>
@@ -12949,8 +12949,8 @@
         </p:nvSpPr>
         <p:spPr>
           <a:xfrm>
-            <a:off x="365760" y="2194560"/>
-            <a:ext cx="54864" cy="777240"/>
+            <a:off x="365760" y="2057400"/>
+            <a:ext cx="54864" cy="713232"/>
           </a:xfrm>
           <a:prstGeom prst="rect">
             <a:avLst/>
@@ -12969,7 +12969,7 @@
         </p:nvSpPr>
         <p:spPr>
           <a:xfrm>
-            <a:off x="594360" y="2359152"/>
+            <a:off x="594360" y="2185416"/>
             <a:ext cx="640080" cy="457200"/>
           </a:xfrm>
           <a:prstGeom prst="rect">
@@ -12986,7 +12986,7 @@
               <a:buNone/>
             </a:pPr>
             <a:r>
-              <a:rPr lang="en-US" sz="2600" b="1" dirty="0">
+              <a:rPr lang="en-US" sz="2400" b="1" dirty="0">
                 <a:solidFill>
                   <a:srgbClr val="E8B86A"/>
                 </a:solidFill>
@@ -12996,7 +12996,7 @@
               </a:rPr>
               <a:t>01</a:t>
             </a:r>
-            <a:endParaRPr lang="en-US" sz="2600" dirty="0"/>
+            <a:endParaRPr lang="en-US" sz="2400" dirty="0"/>
           </a:p>
         </p:txBody>
       </p:sp>
@@ -13008,24 +13008,24 @@
         </p:nvSpPr>
         <p:spPr>
           <a:xfrm>
-            <a:off x="1463040" y="2304288"/>
-            <a:ext cx="6858000" cy="365760"/>
-          </a:xfrm>
-          <a:prstGeom prst="rect">
-            <a:avLst/>
-          </a:prstGeom>
-          <a:noFill/>
-          <a:ln/>
-        </p:spPr>
-        <p:txBody>
-          <a:bodyPr wrap="square" lIns="0" tIns="0" rIns="0" bIns="0" rtlCol="0" anchor="ctr"/>
-          <a:lstStyle/>
-          <a:p>
-            <a:pPr indent="0" marL="0">
-              <a:buNone/>
-            </a:pPr>
-            <a:r>
-              <a:rPr lang="en-US" sz="1800" b="1" dirty="0">
+            <a:off x="1371600" y="2130552"/>
+            <a:ext cx="6949440" cy="347472"/>
+          </a:xfrm>
+          <a:prstGeom prst="rect">
+            <a:avLst/>
+          </a:prstGeom>
+          <a:noFill/>
+          <a:ln/>
+        </p:spPr>
+        <p:txBody>
+          <a:bodyPr wrap="square" lIns="0" tIns="0" rIns="0" bIns="0" rtlCol="0" anchor="ctr"/>
+          <a:lstStyle/>
+          <a:p>
+            <a:pPr indent="0" marL="0">
+              <a:buNone/>
+            </a:pPr>
+            <a:r>
+              <a:rPr lang="en-US" sz="1700" b="1" dirty="0">
                 <a:solidFill>
                   <a:srgbClr val="F6F2E9"/>
                 </a:solidFill>
@@ -13035,7 +13035,7 @@
               </a:rPr>
               <a:t>把你的封号邮件发过来</a:t>
             </a:r>
-            <a:endParaRPr lang="en-US" sz="1800" dirty="0"/>
+            <a:endParaRPr lang="en-US" sz="1700" dirty="0"/>
           </a:p>
         </p:txBody>
       </p:sp>
@@ -13047,8 +13047,8 @@
         </p:nvSpPr>
         <p:spPr>
           <a:xfrm>
-            <a:off x="1463040" y="2651760"/>
-            <a:ext cx="6858000" cy="274320"/>
+            <a:off x="1371600" y="2450592"/>
+            <a:ext cx="6949440" cy="274320"/>
           </a:xfrm>
           <a:prstGeom prst="rect">
             <a:avLst/>
@@ -13086,8 +13086,8 @@
         </p:nvSpPr>
         <p:spPr>
           <a:xfrm>
-            <a:off x="365760" y="3136392"/>
-            <a:ext cx="8412480" cy="777240"/>
+            <a:off x="365760" y="2889504"/>
+            <a:ext cx="8412480" cy="713232"/>
           </a:xfrm>
           <a:prstGeom prst="rect">
             <a:avLst/>
@@ -13111,8 +13111,8 @@
         </p:nvSpPr>
         <p:spPr>
           <a:xfrm>
-            <a:off x="365760" y="3136392"/>
-            <a:ext cx="54864" cy="777240"/>
+            <a:off x="365760" y="2889504"/>
+            <a:ext cx="54864" cy="713232"/>
           </a:xfrm>
           <a:prstGeom prst="rect">
             <a:avLst/>
@@ -13131,7 +13131,7 @@
         </p:nvSpPr>
         <p:spPr>
           <a:xfrm>
-            <a:off x="594360" y="3300984"/>
+            <a:off x="594360" y="3017520"/>
             <a:ext cx="640080" cy="457200"/>
           </a:xfrm>
           <a:prstGeom prst="rect">
@@ -13148,7 +13148,7 @@
               <a:buNone/>
             </a:pPr>
             <a:r>
-              <a:rPr lang="en-US" sz="2600" b="1" dirty="0">
+              <a:rPr lang="en-US" sz="2400" b="1" dirty="0">
                 <a:solidFill>
                   <a:srgbClr val="E8B86A"/>
                 </a:solidFill>
@@ -13158,7 +13158,7 @@
               </a:rPr>
               <a:t>02</a:t>
             </a:r>
-            <a:endParaRPr lang="en-US" sz="2600" dirty="0"/>
+            <a:endParaRPr lang="en-US" sz="2400" dirty="0"/>
           </a:p>
         </p:txBody>
       </p:sp>
@@ -13170,24 +13170,24 @@
         </p:nvSpPr>
         <p:spPr>
           <a:xfrm>
-            <a:off x="1463040" y="3246120"/>
-            <a:ext cx="6858000" cy="365760"/>
-          </a:xfrm>
-          <a:prstGeom prst="rect">
-            <a:avLst/>
-          </a:prstGeom>
-          <a:noFill/>
-          <a:ln/>
-        </p:spPr>
-        <p:txBody>
-          <a:bodyPr wrap="square" lIns="0" tIns="0" rIns="0" bIns="0" rtlCol="0" anchor="ctr"/>
-          <a:lstStyle/>
-          <a:p>
-            <a:pPr indent="0" marL="0">
-              <a:buNone/>
-            </a:pPr>
-            <a:r>
-              <a:rPr lang="en-US" sz="1800" b="1" dirty="0">
+            <a:off x="1371600" y="2962656"/>
+            <a:ext cx="6949440" cy="347472"/>
+          </a:xfrm>
+          <a:prstGeom prst="rect">
+            <a:avLst/>
+          </a:prstGeom>
+          <a:noFill/>
+          <a:ln/>
+        </p:spPr>
+        <p:txBody>
+          <a:bodyPr wrap="square" lIns="0" tIns="0" rIns="0" bIns="0" rtlCol="0" anchor="ctr"/>
+          <a:lstStyle/>
+          <a:p>
+            <a:pPr indent="0" marL="0">
+              <a:buNone/>
+            </a:pPr>
+            <a:r>
+              <a:rPr lang="en-US" sz="1700" b="1" dirty="0">
                 <a:solidFill>
                   <a:srgbClr val="F6F2E9"/>
                 </a:solidFill>
@@ -13197,7 +13197,7 @@
               </a:rPr>
               <a:t>2 个工作小时内拿到诊断报告</a:t>
             </a:r>
-            <a:endParaRPr lang="en-US" sz="1800" dirty="0"/>
+            <a:endParaRPr lang="en-US" sz="1700" dirty="0"/>
           </a:p>
         </p:txBody>
       </p:sp>
@@ -13209,8 +13209,8 @@
         </p:nvSpPr>
         <p:spPr>
           <a:xfrm>
-            <a:off x="1463040" y="3593592"/>
-            <a:ext cx="6858000" cy="274320"/>
+            <a:off x="1371600" y="3282696"/>
+            <a:ext cx="6949440" cy="274320"/>
           </a:xfrm>
           <a:prstGeom prst="rect">
             <a:avLst/>
@@ -13248,8 +13248,8 @@
         </p:nvSpPr>
         <p:spPr>
           <a:xfrm>
-            <a:off x="365760" y="4078224"/>
-            <a:ext cx="8412480" cy="777240"/>
+            <a:off x="365760" y="3721608"/>
+            <a:ext cx="8412480" cy="713232"/>
           </a:xfrm>
           <a:prstGeom prst="rect">
             <a:avLst/>
@@ -13273,8 +13273,8 @@
         </p:nvSpPr>
         <p:spPr>
           <a:xfrm>
-            <a:off x="365760" y="4078224"/>
-            <a:ext cx="54864" cy="777240"/>
+            <a:off x="365760" y="3721608"/>
+            <a:ext cx="54864" cy="713232"/>
           </a:xfrm>
           <a:prstGeom prst="rect">
             <a:avLst/>
@@ -13293,7 +13293,7 @@
         </p:nvSpPr>
         <p:spPr>
           <a:xfrm>
-            <a:off x="594360" y="4242816"/>
+            <a:off x="594360" y="3849624"/>
             <a:ext cx="640080" cy="457200"/>
           </a:xfrm>
           <a:prstGeom prst="rect">
@@ -13310,7 +13310,7 @@
               <a:buNone/>
             </a:pPr>
             <a:r>
-              <a:rPr lang="en-US" sz="2600" b="1" dirty="0">
+              <a:rPr lang="en-US" sz="2400" b="1" dirty="0">
                 <a:solidFill>
                   <a:srgbClr val="E8B86A"/>
                 </a:solidFill>
@@ -13320,7 +13320,7 @@
               </a:rPr>
               <a:t>03</a:t>
             </a:r>
-            <a:endParaRPr lang="en-US" sz="2600" dirty="0"/>
+            <a:endParaRPr lang="en-US" sz="2400" dirty="0"/>
           </a:p>
         </p:txBody>
       </p:sp>
@@ -13332,24 +13332,24 @@
         </p:nvSpPr>
         <p:spPr>
           <a:xfrm>
-            <a:off x="1463040" y="4187952"/>
-            <a:ext cx="6858000" cy="365760"/>
-          </a:xfrm>
-          <a:prstGeom prst="rect">
-            <a:avLst/>
-          </a:prstGeom>
-          <a:noFill/>
-          <a:ln/>
-        </p:spPr>
-        <p:txBody>
-          <a:bodyPr wrap="square" lIns="0" tIns="0" rIns="0" bIns="0" rtlCol="0" anchor="ctr"/>
-          <a:lstStyle/>
-          <a:p>
-            <a:pPr indent="0" marL="0">
-              <a:buNone/>
-            </a:pPr>
-            <a:r>
-              <a:rPr lang="en-US" sz="1800" b="1" dirty="0">
+            <a:off x="1371600" y="3794760"/>
+            <a:ext cx="6949440" cy="347472"/>
+          </a:xfrm>
+          <a:prstGeom prst="rect">
+            <a:avLst/>
+          </a:prstGeom>
+          <a:noFill/>
+          <a:ln/>
+        </p:spPr>
+        <p:txBody>
+          <a:bodyPr wrap="square" lIns="0" tIns="0" rIns="0" bIns="0" rtlCol="0" anchor="ctr"/>
+          <a:lstStyle/>
+          <a:p>
+            <a:pPr indent="0" marL="0">
+              <a:buNone/>
+            </a:pPr>
+            <a:r>
+              <a:rPr lang="en-US" sz="1700" b="1" dirty="0">
                 <a:solidFill>
                   <a:srgbClr val="F6F2E9"/>
                 </a:solidFill>
@@ -13359,7 +13359,7 @@
               </a:rPr>
               <a:t>决定要不要继续</a:t>
             </a:r>
-            <a:endParaRPr lang="en-US" sz="1800" dirty="0"/>
+            <a:endParaRPr lang="en-US" sz="1700" dirty="0"/>
           </a:p>
         </p:txBody>
       </p:sp>
@@ -13371,8 +13371,8 @@
         </p:nvSpPr>
         <p:spPr>
           <a:xfrm>
-            <a:off x="1463040" y="4535424"/>
-            <a:ext cx="6858000" cy="274320"/>
+            <a:off x="1371600" y="4114800"/>
+            <a:ext cx="6949440" cy="274320"/>
           </a:xfrm>
           <a:prstGeom prst="rect">
             <a:avLst/>
@@ -13410,24 +13410,24 @@
         </p:nvSpPr>
         <p:spPr>
           <a:xfrm>
-            <a:off x="365760" y="4617720"/>
-            <a:ext cx="8412480" cy="274320"/>
-          </a:xfrm>
-          <a:prstGeom prst="rect">
-            <a:avLst/>
-          </a:prstGeom>
-          <a:noFill/>
-          <a:ln/>
-        </p:spPr>
-        <p:txBody>
-          <a:bodyPr wrap="square" lIns="0" tIns="0" rIns="0" bIns="0" rtlCol="0" anchor="ctr"/>
-          <a:lstStyle/>
-          <a:p>
-            <a:pPr indent="0" marL="0">
-              <a:buNone/>
-            </a:pPr>
-            <a:r>
-              <a:rPr lang="en-US" sz="1300" i="1" dirty="0">
+            <a:off x="365760" y="4526280"/>
+            <a:ext cx="8412480" cy="228600"/>
+          </a:xfrm>
+          <a:prstGeom prst="rect">
+            <a:avLst/>
+          </a:prstGeom>
+          <a:noFill/>
+          <a:ln/>
+        </p:spPr>
+        <p:txBody>
+          <a:bodyPr wrap="square" lIns="0" tIns="0" rIns="0" bIns="0" rtlCol="0" anchor="ctr"/>
+          <a:lstStyle/>
+          <a:p>
+            <a:pPr indent="0" marL="0">
+              <a:buNone/>
+            </a:pPr>
+            <a:r>
+              <a:rPr lang="en-US" sz="1300" dirty="0">
                 <a:solidFill>
                   <a:srgbClr val="E8B86A"/>
                 </a:solidFill>
@@ -13755,7 +13755,7 @@
               <a:buNone/>
             </a:pPr>
             <a:r>
-              <a:rPr lang="en-US" sz="13000" b="1" dirty="0">
+              <a:rPr lang="en-US" sz="7000" b="1" dirty="0">
                 <a:solidFill>
                   <a:srgbClr val="0B3D4F"/>
                 </a:solidFill>
@@ -13763,9 +13763,51 @@
                 <a:ea typeface="Songti SC" pitchFamily="34" charset="-122"/>
                 <a:cs typeface="Songti SC" pitchFamily="34" charset="-120"/>
               </a:rPr>
-              <a:t>¥30 亿+</a:t>
-            </a:r>
-            <a:endParaRPr lang="en-US" sz="13000" dirty="0"/>
+              <a:t>¥</a:t>
+            </a:r>
+            <a:pPr indent="0" marL="0">
+              <a:buNone/>
+            </a:pPr>
+            <a:r>
+              <a:rPr lang="en-US" sz="13000" b="1" dirty="0">
+                <a:solidFill>
+                  <a:srgbClr val="0B3D4F"/>
+                </a:solidFill>
+                <a:latin typeface="Songti SC" pitchFamily="34" charset="0"/>
+                <a:ea typeface="Songti SC" pitchFamily="34" charset="-122"/>
+                <a:cs typeface="Songti SC" pitchFamily="34" charset="-120"/>
+              </a:rPr>
+              <a:t>30</a:t>
+            </a:r>
+            <a:pPr indent="0" marL="0">
+              <a:buNone/>
+            </a:pPr>
+            <a:r>
+              <a:rPr lang="en-US" sz="9000" b="1" dirty="0">
+                <a:solidFill>
+                  <a:srgbClr val="0B3D4F"/>
+                </a:solidFill>
+                <a:latin typeface="Songti SC" pitchFamily="34" charset="0"/>
+                <a:ea typeface="Songti SC" pitchFamily="34" charset="-122"/>
+                <a:cs typeface="Songti SC" pitchFamily="34" charset="-120"/>
+              </a:rPr>
+              <a:t> 亿</a:t>
+            </a:r>
+            <a:pPr indent="0" marL="0">
+              <a:buNone/>
+            </a:pPr>
+            <a:r>
+              <a:rPr lang="en-US" sz="8000" b="1" dirty="0">
+                <a:solidFill>
+                  <a:srgbClr val="0B3D4F"/>
+                </a:solidFill>
+                <a:latin typeface="Songti SC" pitchFamily="34" charset="0"/>
+                <a:ea typeface="Songti SC" pitchFamily="34" charset="-122"/>
+                <a:cs typeface="Songti SC" pitchFamily="34" charset="-120"/>
+              </a:rPr>
+              <a:t> +</a:t>
+            </a:r>
+            <a:endParaRPr lang="en-US" sz="7000" dirty="0"/>
           </a:p>
         </p:txBody>
       </p:sp>
@@ -16090,7 +16132,7 @@
                 <a:ea typeface="Songti SC" pitchFamily="34" charset="-122"/>
                 <a:cs typeface="Songti SC" pitchFamily="34" charset="-120"/>
               </a:rPr>
-              <a:t>出事就消失的对接人</a:t>
+              <a:t>出事就失联</a:t>
             </a:r>
             <a:endParaRPr lang="en-US" sz="1700" dirty="0"/>
           </a:p>
@@ -18582,7 +18624,7 @@
                 <a:ea typeface="Songti SC" pitchFamily="34" charset="-122"/>
                 <a:cs typeface="Songti SC" pitchFamily="34" charset="-120"/>
               </a:rPr>
-              <a:t>希望走「特殊渠道」的客户</a:t>
+              <a:t>走「特殊渠道」</a:t>
             </a:r>
             <a:endParaRPr lang="en-US" sz="1300" dirty="0"/>
           </a:p>
@@ -18652,7 +18694,7 @@
               <a:buNone/>
             </a:pPr>
             <a:r>
-              <a:rPr lang="en-US" sz="1200" i="1" dirty="0">
+              <a:rPr lang="en-US" sz="1200" dirty="0">
                 <a:solidFill>
                   <a:srgbClr val="E8B86A"/>
                 </a:solidFill>
@@ -18885,24 +18927,24 @@
         </p:nvSpPr>
         <p:spPr>
           <a:xfrm>
-            <a:off x="365760" y="914400"/>
-            <a:ext cx="8412480" cy="502920"/>
-          </a:xfrm>
-          <a:prstGeom prst="rect">
-            <a:avLst/>
-          </a:prstGeom>
-          <a:noFill/>
-          <a:ln/>
-        </p:spPr>
-        <p:txBody>
-          <a:bodyPr wrap="square" lIns="0" tIns="0" rIns="0" bIns="0" rtlCol="0" anchor="ctr"/>
-          <a:lstStyle/>
-          <a:p>
-            <a:pPr indent="0" marL="0">
-              <a:buNone/>
-            </a:pPr>
-            <a:r>
-              <a:rPr lang="en-US" sz="2800" b="1" dirty="0">
+            <a:off x="365760" y="868680"/>
+            <a:ext cx="8412480" cy="457200"/>
+          </a:xfrm>
+          <a:prstGeom prst="rect">
+            <a:avLst/>
+          </a:prstGeom>
+          <a:noFill/>
+          <a:ln/>
+        </p:spPr>
+        <p:txBody>
+          <a:bodyPr wrap="square" lIns="0" tIns="0" rIns="0" bIns="0" rtlCol="0" anchor="ctr"/>
+          <a:lstStyle/>
+          <a:p>
+            <a:pPr indent="0" marL="0">
+              <a:buNone/>
+            </a:pPr>
+            <a:r>
+              <a:rPr lang="en-US" sz="2600" b="1" dirty="0">
                 <a:solidFill>
                   <a:srgbClr val="141414"/>
                 </a:solidFill>
@@ -18912,7 +18954,7 @@
               </a:rPr>
               <a:t>「境内合规」不是口号</a:t>
             </a:r>
-            <a:endParaRPr lang="en-US" sz="2800" dirty="0"/>
+            <a:endParaRPr lang="en-US" sz="2600" dirty="0"/>
           </a:p>
         </p:txBody>
       </p:sp>
@@ -18924,24 +18966,24 @@
         </p:nvSpPr>
         <p:spPr>
           <a:xfrm>
-            <a:off x="365760" y="1417320"/>
-            <a:ext cx="8412480" cy="411480"/>
-          </a:xfrm>
-          <a:prstGeom prst="rect">
-            <a:avLst/>
-          </a:prstGeom>
-          <a:noFill/>
-          <a:ln/>
-        </p:spPr>
-        <p:txBody>
-          <a:bodyPr wrap="square" lIns="0" tIns="0" rIns="0" bIns="0" rtlCol="0" anchor="ctr"/>
-          <a:lstStyle/>
-          <a:p>
-            <a:pPr indent="0" marL="0">
-              <a:buNone/>
-            </a:pPr>
-            <a:r>
-              <a:rPr lang="en-US" sz="1600" dirty="0">
+            <a:off x="365760" y="1325880"/>
+            <a:ext cx="8412480" cy="365760"/>
+          </a:xfrm>
+          <a:prstGeom prst="rect">
+            <a:avLst/>
+          </a:prstGeom>
+          <a:noFill/>
+          <a:ln/>
+        </p:spPr>
+        <p:txBody>
+          <a:bodyPr wrap="square" lIns="0" tIns="0" rIns="0" bIns="0" rtlCol="0" anchor="ctr"/>
+          <a:lstStyle/>
+          <a:p>
+            <a:pPr indent="0" marL="0">
+              <a:buNone/>
+            </a:pPr>
+            <a:r>
+              <a:rPr lang="en-US" sz="1400" dirty="0">
                 <a:solidFill>
                   <a:srgbClr val="0B3D4F"/>
                 </a:solidFill>
@@ -18951,20 +18993,59 @@
               </a:rPr>
               <a:t>是把 4 件事全部锁在境内的工程闭环。</a:t>
             </a:r>
-            <a:endParaRPr lang="en-US" sz="1600" dirty="0"/>
-          </a:p>
-        </p:txBody>
-      </p:sp>
-      <p:sp>
-        <p:nvSpPr>
-          <p:cNvPr id="7" name="Shape 5"/>
-          <p:cNvSpPr/>
-          <p:nvPr/>
-        </p:nvSpPr>
-        <p:spPr>
-          <a:xfrm>
-            <a:off x="3794760" y="2606040"/>
-            <a:ext cx="1554480" cy="1554480"/>
+            <a:endParaRPr lang="en-US" sz="1400" dirty="0"/>
+          </a:p>
+        </p:txBody>
+      </p:sp>
+      <p:sp>
+        <p:nvSpPr>
+          <p:cNvPr id="7" name="Text 5"/>
+          <p:cNvSpPr/>
+          <p:nvPr/>
+        </p:nvSpPr>
+        <p:spPr>
+          <a:xfrm>
+            <a:off x="365760" y="1691640"/>
+            <a:ext cx="8412480" cy="320040"/>
+          </a:xfrm>
+          <a:prstGeom prst="rect">
+            <a:avLst/>
+          </a:prstGeom>
+          <a:noFill/>
+          <a:ln/>
+        </p:spPr>
+        <p:txBody>
+          <a:bodyPr wrap="square" lIns="0" tIns="0" rIns="0" bIns="0" rtlCol="0" anchor="ctr"/>
+          <a:lstStyle/>
+          <a:p>
+            <a:pPr indent="0" marL="0">
+              <a:buNone/>
+            </a:pPr>
+            <a:r>
+              <a:rPr lang="en-US" sz="1200" dirty="0">
+                <a:solidFill>
+                  <a:srgbClr val="6E6A5F"/>
+                </a:solidFill>
+                <a:latin typeface="PingFang SC" pitchFamily="34" charset="0"/>
+                <a:ea typeface="PingFang SC" pitchFamily="34" charset="-122"/>
+                <a:cs typeface="PingFang SC" pitchFamily="34" charset="-120"/>
+              </a:rPr>
+              <a:t>行业里几乎所有同行至少缺一环——4 件事一件不缺，是非常稀缺的。</a:t>
+            </a:r>
+            <a:endParaRPr lang="en-US" sz="1200" dirty="0"/>
+          </a:p>
+        </p:txBody>
+      </p:sp>
+      <p:sp>
+        <p:nvSpPr>
+          <p:cNvPr id="8" name="Shape 6"/>
+          <p:cNvSpPr/>
+          <p:nvPr/>
+        </p:nvSpPr>
+        <p:spPr>
+          <a:xfrm>
+            <a:off x="3858768" y="2670048"/>
+            <a:ext cx="1426464" cy="1426464"/>
           </a:xfrm>
           <a:prstGeom prst="ellipse">
             <a:avLst/>
@@ -18977,14 +19058,14 @@
       </p:sp>
       <p:sp>
         <p:nvSpPr>
-          <p:cNvPr id="8" name="Text 6"/>
-          <p:cNvSpPr/>
-          <p:nvPr/>
-        </p:nvSpPr>
-        <p:spPr>
-          <a:xfrm>
-            <a:off x="3794760" y="3017520"/>
-            <a:ext cx="1554480" cy="731520"/>
+          <p:cNvPr id="9" name="Text 7"/>
+          <p:cNvSpPr/>
+          <p:nvPr/>
+        </p:nvSpPr>
+        <p:spPr>
+          <a:xfrm>
+            <a:off x="3858768" y="3017520"/>
+            <a:ext cx="1426464" cy="731520"/>
           </a:xfrm>
           <a:prstGeom prst="rect">
             <a:avLst/>
@@ -19000,7 +19081,7 @@
               <a:buNone/>
             </a:pPr>
             <a:r>
-              <a:rPr lang="en-US" sz="1800" b="1" dirty="0">
+              <a:rPr lang="en-US" sz="1700" b="1" dirty="0">
                 <a:solidFill>
                   <a:srgbClr val="F6F2E9"/>
                 </a:solidFill>
@@ -19010,14 +19091,14 @@
               </a:rPr>
               <a:t>境内</a:t>
             </a:r>
-            <a:endParaRPr lang="en-US" sz="1800" dirty="0"/>
+            <a:endParaRPr lang="en-US" sz="1700" dirty="0"/>
           </a:p>
           <a:p>
             <a:pPr algn="ctr" indent="0" marL="0">
               <a:buNone/>
             </a:pPr>
             <a:r>
-              <a:rPr lang="en-US" sz="1800" b="1" dirty="0">
+              <a:rPr lang="en-US" sz="1700" b="1" dirty="0">
                 <a:solidFill>
                   <a:srgbClr val="E8B86A"/>
                 </a:solidFill>
@@ -19027,20 +19108,20 @@
               </a:rPr>
               <a:t>闭环</a:t>
             </a:r>
-            <a:endParaRPr lang="en-US" sz="1800" dirty="0"/>
-          </a:p>
-        </p:txBody>
-      </p:sp>
-      <p:sp>
-        <p:nvSpPr>
-          <p:cNvPr id="9" name="Shape 7"/>
-          <p:cNvSpPr/>
-          <p:nvPr/>
-        </p:nvSpPr>
-        <p:spPr>
-          <a:xfrm>
-            <a:off x="91440" y="1783080"/>
-            <a:ext cx="2560320" cy="822960"/>
+            <a:endParaRPr lang="en-US" sz="1700" dirty="0"/>
+          </a:p>
+        </p:txBody>
+      </p:sp>
+      <p:sp>
+        <p:nvSpPr>
+          <p:cNvPr id="10" name="Shape 8"/>
+          <p:cNvSpPr/>
+          <p:nvPr/>
+        </p:nvSpPr>
+        <p:spPr>
+          <a:xfrm>
+            <a:off x="411480" y="2103120"/>
+            <a:ext cx="2286000" cy="731520"/>
           </a:xfrm>
           <a:prstGeom prst="rect">
             <a:avLst/>
@@ -19058,30 +19139,30 @@
       </p:sp>
       <p:sp>
         <p:nvSpPr>
-          <p:cNvPr id="10" name="Text 8"/>
-          <p:cNvSpPr/>
-          <p:nvPr/>
-        </p:nvSpPr>
-        <p:spPr>
-          <a:xfrm>
-            <a:off x="228600" y="1856232"/>
-            <a:ext cx="2286000" cy="274320"/>
-          </a:xfrm>
-          <a:prstGeom prst="rect">
-            <a:avLst/>
-          </a:prstGeom>
-          <a:noFill/>
-          <a:ln/>
-        </p:spPr>
-        <p:txBody>
-          <a:bodyPr wrap="square" lIns="0" tIns="0" rIns="0" bIns="0" rtlCol="0" anchor="ctr"/>
-          <a:lstStyle/>
-          <a:p>
-            <a:pPr indent="0" marL="0">
-              <a:buNone/>
-            </a:pPr>
-            <a:r>
-              <a:rPr lang="en-US" sz="1100" b="1" spc="300" kern="0" dirty="0">
+          <p:cNvPr id="11" name="Text 9"/>
+          <p:cNvSpPr/>
+          <p:nvPr/>
+        </p:nvSpPr>
+        <p:spPr>
+          <a:xfrm>
+            <a:off x="521208" y="2157984"/>
+            <a:ext cx="2066544" cy="256032"/>
+          </a:xfrm>
+          <a:prstGeom prst="rect">
+            <a:avLst/>
+          </a:prstGeom>
+          <a:noFill/>
+          <a:ln/>
+        </p:spPr>
+        <p:txBody>
+          <a:bodyPr wrap="square" lIns="0" tIns="0" rIns="0" bIns="0" rtlCol="0" anchor="ctr"/>
+          <a:lstStyle/>
+          <a:p>
+            <a:pPr indent="0" marL="0">
+              <a:buNone/>
+            </a:pPr>
+            <a:r>
+              <a:rPr lang="en-US" sz="1000" b="1" spc="300" kern="0" dirty="0">
                 <a:solidFill>
                   <a:srgbClr val="0B3D4F"/>
                 </a:solidFill>
@@ -19091,36 +19172,36 @@
               </a:rPr>
               <a:t>合 同 主 体</a:t>
             </a:r>
-            <a:endParaRPr lang="en-US" sz="1100" dirty="0"/>
-          </a:p>
-        </p:txBody>
-      </p:sp>
-      <p:sp>
-        <p:nvSpPr>
-          <p:cNvPr id="11" name="Text 9"/>
-          <p:cNvSpPr/>
-          <p:nvPr/>
-        </p:nvSpPr>
-        <p:spPr>
-          <a:xfrm>
-            <a:off x="228600" y="2167128"/>
-            <a:ext cx="2286000" cy="365760"/>
-          </a:xfrm>
-          <a:prstGeom prst="rect">
-            <a:avLst/>
-          </a:prstGeom>
-          <a:noFill/>
-          <a:ln/>
-        </p:spPr>
-        <p:txBody>
-          <a:bodyPr wrap="square" lIns="0" tIns="0" rIns="0" bIns="0" rtlCol="0" anchor="ctr"/>
-          <a:lstStyle/>
-          <a:p>
-            <a:pPr indent="0" marL="0">
-              <a:buNone/>
-            </a:pPr>
-            <a:r>
-              <a:rPr lang="en-US" sz="1200" b="1" dirty="0">
+            <a:endParaRPr lang="en-US" sz="1000" dirty="0"/>
+          </a:p>
+        </p:txBody>
+      </p:sp>
+      <p:sp>
+        <p:nvSpPr>
+          <p:cNvPr id="12" name="Text 10"/>
+          <p:cNvSpPr/>
+          <p:nvPr/>
+        </p:nvSpPr>
+        <p:spPr>
+          <a:xfrm>
+            <a:off x="521208" y="2432304"/>
+            <a:ext cx="2066544" cy="365760"/>
+          </a:xfrm>
+          <a:prstGeom prst="rect">
+            <a:avLst/>
+          </a:prstGeom>
+          <a:noFill/>
+          <a:ln/>
+        </p:spPr>
+        <p:txBody>
+          <a:bodyPr wrap="square" lIns="0" tIns="0" rIns="0" bIns="0" rtlCol="0" anchor="ctr"/>
+          <a:lstStyle/>
+          <a:p>
+            <a:pPr indent="0" marL="0">
+              <a:buNone/>
+            </a:pPr>
+            <a:r>
+              <a:rPr lang="en-US" sz="1100" b="1" dirty="0">
                 <a:solidFill>
                   <a:srgbClr val="141414"/>
                 </a:solidFill>
@@ -19130,32 +19211,9 @@
               </a:rPr>
               <a:t>上海公司 · 工商可查</a:t>
             </a:r>
-            <a:endParaRPr lang="en-US" sz="1200" dirty="0"/>
-          </a:p>
-        </p:txBody>
-      </p:sp>
-      <p:sp>
-        <p:nvSpPr>
-          <p:cNvPr id="12" name="Shape 10"/>
-          <p:cNvSpPr/>
-          <p:nvPr/>
-        </p:nvSpPr>
-        <p:spPr>
-          <a:xfrm flipV="1">
-            <a:off x="2651760" y="2194560"/>
-            <a:ext cx="2697480" cy="761238"/>
-          </a:xfrm>
-          <a:prstGeom prst="line">
-            <a:avLst/>
-          </a:prstGeom>
-          <a:noFill/>
-          <a:ln w="12700">
-            <a:solidFill>
-              <a:srgbClr val="BDB39A"/>
-            </a:solidFill>
-            <a:prstDash val="dash"/>
-          </a:ln>
-        </p:spPr>
+            <a:endParaRPr lang="en-US" sz="1100" dirty="0"/>
+          </a:p>
+        </p:txBody>
       </p:sp>
       <p:sp>
         <p:nvSpPr>
@@ -19165,8 +19223,8 @@
         </p:nvSpPr>
         <p:spPr>
           <a:xfrm>
-            <a:off x="6492240" y="1783080"/>
-            <a:ext cx="2560320" cy="822960"/>
+            <a:off x="6446520" y="2103120"/>
+            <a:ext cx="2286000" cy="731520"/>
           </a:xfrm>
           <a:prstGeom prst="rect">
             <a:avLst/>
@@ -19190,24 +19248,24 @@
         </p:nvSpPr>
         <p:spPr>
           <a:xfrm>
-            <a:off x="6629400" y="1856232"/>
-            <a:ext cx="2286000" cy="274320"/>
-          </a:xfrm>
-          <a:prstGeom prst="rect">
-            <a:avLst/>
-          </a:prstGeom>
-          <a:noFill/>
-          <a:ln/>
-        </p:spPr>
-        <p:txBody>
-          <a:bodyPr wrap="square" lIns="0" tIns="0" rIns="0" bIns="0" rtlCol="0" anchor="ctr"/>
-          <a:lstStyle/>
-          <a:p>
-            <a:pPr indent="0" marL="0">
-              <a:buNone/>
-            </a:pPr>
-            <a:r>
-              <a:rPr lang="en-US" sz="1100" b="1" spc="300" kern="0" dirty="0">
+            <a:off x="6556248" y="2157984"/>
+            <a:ext cx="2066544" cy="256032"/>
+          </a:xfrm>
+          <a:prstGeom prst="rect">
+            <a:avLst/>
+          </a:prstGeom>
+          <a:noFill/>
+          <a:ln/>
+        </p:spPr>
+        <p:txBody>
+          <a:bodyPr wrap="square" lIns="0" tIns="0" rIns="0" bIns="0" rtlCol="0" anchor="ctr"/>
+          <a:lstStyle/>
+          <a:p>
+            <a:pPr indent="0" marL="0">
+              <a:buNone/>
+            </a:pPr>
+            <a:r>
+              <a:rPr lang="en-US" sz="1000" b="1" spc="300" kern="0" dirty="0">
                 <a:solidFill>
                   <a:srgbClr val="0B3D4F"/>
                 </a:solidFill>
@@ -19217,7 +19275,7 @@
               </a:rPr>
               <a:t>收 付 款</a:t>
             </a:r>
-            <a:endParaRPr lang="en-US" sz="1100" dirty="0"/>
+            <a:endParaRPr lang="en-US" sz="1000" dirty="0"/>
           </a:p>
         </p:txBody>
       </p:sp>
@@ -19229,24 +19287,24 @@
         </p:nvSpPr>
         <p:spPr>
           <a:xfrm>
-            <a:off x="6629400" y="2167128"/>
-            <a:ext cx="2286000" cy="365760"/>
-          </a:xfrm>
-          <a:prstGeom prst="rect">
-            <a:avLst/>
-          </a:prstGeom>
-          <a:noFill/>
-          <a:ln/>
-        </p:spPr>
-        <p:txBody>
-          <a:bodyPr wrap="square" lIns="0" tIns="0" rIns="0" bIns="0" rtlCol="0" anchor="ctr"/>
-          <a:lstStyle/>
-          <a:p>
-            <a:pPr indent="0" marL="0">
-              <a:buNone/>
-            </a:pPr>
-            <a:r>
-              <a:rPr lang="en-US" sz="1200" b="1" dirty="0">
+            <a:off x="6556248" y="2432304"/>
+            <a:ext cx="2066544" cy="365760"/>
+          </a:xfrm>
+          <a:prstGeom prst="rect">
+            <a:avLst/>
+          </a:prstGeom>
+          <a:noFill/>
+          <a:ln/>
+        </p:spPr>
+        <p:txBody>
+          <a:bodyPr wrap="square" lIns="0" tIns="0" rIns="0" bIns="0" rtlCol="0" anchor="ctr"/>
+          <a:lstStyle/>
+          <a:p>
+            <a:pPr indent="0" marL="0">
+              <a:buNone/>
+            </a:pPr>
+            <a:r>
+              <a:rPr lang="en-US" sz="1100" b="1" dirty="0">
                 <a:solidFill>
                   <a:srgbClr val="141414"/>
                 </a:solidFill>
@@ -19256,7 +19314,7 @@
               </a:rPr>
               <a:t>对公账户 · 人民币</a:t>
             </a:r>
-            <a:endParaRPr lang="en-US" sz="1200" dirty="0"/>
+            <a:endParaRPr lang="en-US" sz="1100" dirty="0"/>
           </a:p>
         </p:txBody>
       </p:sp>
@@ -19268,31 +19326,8 @@
         </p:nvSpPr>
         <p:spPr>
           <a:xfrm>
-            <a:off x="3794760" y="2194560"/>
-            <a:ext cx="2697480" cy="761238"/>
-          </a:xfrm>
-          <a:prstGeom prst="line">
-            <a:avLst/>
-          </a:prstGeom>
-          <a:noFill/>
-          <a:ln w="12700">
-            <a:solidFill>
-              <a:srgbClr val="BDB39A"/>
-            </a:solidFill>
-            <a:prstDash val="dash"/>
-          </a:ln>
-        </p:spPr>
-      </p:sp>
-      <p:sp>
-        <p:nvSpPr>
-          <p:cNvPr id="17" name="Shape 15"/>
-          <p:cNvSpPr/>
-          <p:nvPr/>
-        </p:nvSpPr>
-        <p:spPr>
-          <a:xfrm>
-            <a:off x="91440" y="4160520"/>
-            <a:ext cx="2560320" cy="822960"/>
+            <a:off x="411480" y="3931920"/>
+            <a:ext cx="2286000" cy="731520"/>
           </a:xfrm>
           <a:prstGeom prst="rect">
             <a:avLst/>
@@ -19310,30 +19345,30 @@
       </p:sp>
       <p:sp>
         <p:nvSpPr>
-          <p:cNvPr id="18" name="Text 16"/>
-          <p:cNvSpPr/>
-          <p:nvPr/>
-        </p:nvSpPr>
-        <p:spPr>
-          <a:xfrm>
-            <a:off x="228600" y="4233672"/>
-            <a:ext cx="2286000" cy="274320"/>
-          </a:xfrm>
-          <a:prstGeom prst="rect">
-            <a:avLst/>
-          </a:prstGeom>
-          <a:noFill/>
-          <a:ln/>
-        </p:spPr>
-        <p:txBody>
-          <a:bodyPr wrap="square" lIns="0" tIns="0" rIns="0" bIns="0" rtlCol="0" anchor="ctr"/>
-          <a:lstStyle/>
-          <a:p>
-            <a:pPr indent="0" marL="0">
-              <a:buNone/>
-            </a:pPr>
-            <a:r>
-              <a:rPr lang="en-US" sz="1100" b="1" spc="300" kern="0" dirty="0">
+          <p:cNvPr id="17" name="Text 15"/>
+          <p:cNvSpPr/>
+          <p:nvPr/>
+        </p:nvSpPr>
+        <p:spPr>
+          <a:xfrm>
+            <a:off x="521208" y="3986784"/>
+            <a:ext cx="2066544" cy="256032"/>
+          </a:xfrm>
+          <a:prstGeom prst="rect">
+            <a:avLst/>
+          </a:prstGeom>
+          <a:noFill/>
+          <a:ln/>
+        </p:spPr>
+        <p:txBody>
+          <a:bodyPr wrap="square" lIns="0" tIns="0" rIns="0" bIns="0" rtlCol="0" anchor="ctr"/>
+          <a:lstStyle/>
+          <a:p>
+            <a:pPr indent="0" marL="0">
+              <a:buNone/>
+            </a:pPr>
+            <a:r>
+              <a:rPr lang="en-US" sz="1000" b="1" spc="300" kern="0" dirty="0">
                 <a:solidFill>
                   <a:srgbClr val="0B3D4F"/>
                 </a:solidFill>
@@ -19343,36 +19378,36 @@
               </a:rPr>
               <a:t>发 票</a:t>
             </a:r>
-            <a:endParaRPr lang="en-US" sz="1100" dirty="0"/>
-          </a:p>
-        </p:txBody>
-      </p:sp>
-      <p:sp>
-        <p:nvSpPr>
-          <p:cNvPr id="19" name="Text 17"/>
-          <p:cNvSpPr/>
-          <p:nvPr/>
-        </p:nvSpPr>
-        <p:spPr>
-          <a:xfrm>
-            <a:off x="228600" y="4544568"/>
-            <a:ext cx="2286000" cy="365760"/>
-          </a:xfrm>
-          <a:prstGeom prst="rect">
-            <a:avLst/>
-          </a:prstGeom>
-          <a:noFill/>
-          <a:ln/>
-        </p:spPr>
-        <p:txBody>
-          <a:bodyPr wrap="square" lIns="0" tIns="0" rIns="0" bIns="0" rtlCol="0" anchor="ctr"/>
-          <a:lstStyle/>
-          <a:p>
-            <a:pPr indent="0" marL="0">
-              <a:buNone/>
-            </a:pPr>
-            <a:r>
-              <a:rPr lang="en-US" sz="1200" b="1" dirty="0">
+            <a:endParaRPr lang="en-US" sz="1000" dirty="0"/>
+          </a:p>
+        </p:txBody>
+      </p:sp>
+      <p:sp>
+        <p:nvSpPr>
+          <p:cNvPr id="18" name="Text 16"/>
+          <p:cNvSpPr/>
+          <p:nvPr/>
+        </p:nvSpPr>
+        <p:spPr>
+          <a:xfrm>
+            <a:off x="521208" y="4261104"/>
+            <a:ext cx="2066544" cy="365760"/>
+          </a:xfrm>
+          <a:prstGeom prst="rect">
+            <a:avLst/>
+          </a:prstGeom>
+          <a:noFill/>
+          <a:ln/>
+        </p:spPr>
+        <p:txBody>
+          <a:bodyPr wrap="square" lIns="0" tIns="0" rIns="0" bIns="0" rtlCol="0" anchor="ctr"/>
+          <a:lstStyle/>
+          <a:p>
+            <a:pPr indent="0" marL="0">
+              <a:buNone/>
+            </a:pPr>
+            <a:r>
+              <a:rPr lang="en-US" sz="1100" b="1" dirty="0">
                 <a:solidFill>
                   <a:srgbClr val="141414"/>
                 </a:solidFill>
@@ -19382,43 +19417,20 @@
               </a:rPr>
               <a:t>6% 增值税专票 / 普票</a:t>
             </a:r>
-            <a:endParaRPr lang="en-US" sz="1200" dirty="0"/>
-          </a:p>
-        </p:txBody>
-      </p:sp>
-      <p:sp>
-        <p:nvSpPr>
-          <p:cNvPr id="20" name="Shape 18"/>
-          <p:cNvSpPr/>
-          <p:nvPr/>
-        </p:nvSpPr>
-        <p:spPr>
-          <a:xfrm>
-            <a:off x="2651760" y="3810762"/>
-            <a:ext cx="2697480" cy="761238"/>
-          </a:xfrm>
-          <a:prstGeom prst="line">
-            <a:avLst/>
-          </a:prstGeom>
-          <a:noFill/>
-          <a:ln w="12700">
-            <a:solidFill>
-              <a:srgbClr val="BDB39A"/>
-            </a:solidFill>
-            <a:prstDash val="dash"/>
-          </a:ln>
-        </p:spPr>
-      </p:sp>
-      <p:sp>
-        <p:nvSpPr>
-          <p:cNvPr id="21" name="Shape 19"/>
-          <p:cNvSpPr/>
-          <p:nvPr/>
-        </p:nvSpPr>
-        <p:spPr>
-          <a:xfrm>
-            <a:off x="6492240" y="4160520"/>
-            <a:ext cx="2560320" cy="822960"/>
+            <a:endParaRPr lang="en-US" sz="1100" dirty="0"/>
+          </a:p>
+        </p:txBody>
+      </p:sp>
+      <p:sp>
+        <p:nvSpPr>
+          <p:cNvPr id="19" name="Shape 17"/>
+          <p:cNvSpPr/>
+          <p:nvPr/>
+        </p:nvSpPr>
+        <p:spPr>
+          <a:xfrm>
+            <a:off x="6446520" y="3931920"/>
+            <a:ext cx="2286000" cy="731520"/>
           </a:xfrm>
           <a:prstGeom prst="rect">
             <a:avLst/>
@@ -19436,30 +19448,30 @@
       </p:sp>
       <p:sp>
         <p:nvSpPr>
-          <p:cNvPr id="22" name="Text 20"/>
-          <p:cNvSpPr/>
-          <p:nvPr/>
-        </p:nvSpPr>
-        <p:spPr>
-          <a:xfrm>
-            <a:off x="6629400" y="4233672"/>
-            <a:ext cx="2286000" cy="274320"/>
-          </a:xfrm>
-          <a:prstGeom prst="rect">
-            <a:avLst/>
-          </a:prstGeom>
-          <a:noFill/>
-          <a:ln/>
-        </p:spPr>
-        <p:txBody>
-          <a:bodyPr wrap="square" lIns="0" tIns="0" rIns="0" bIns="0" rtlCol="0" anchor="ctr"/>
-          <a:lstStyle/>
-          <a:p>
-            <a:pPr indent="0" marL="0">
-              <a:buNone/>
-            </a:pPr>
-            <a:r>
-              <a:rPr lang="en-US" sz="1100" b="1" spc="300" kern="0" dirty="0">
+          <p:cNvPr id="20" name="Text 18"/>
+          <p:cNvSpPr/>
+          <p:nvPr/>
+        </p:nvSpPr>
+        <p:spPr>
+          <a:xfrm>
+            <a:off x="6556248" y="3986784"/>
+            <a:ext cx="2066544" cy="256032"/>
+          </a:xfrm>
+          <a:prstGeom prst="rect">
+            <a:avLst/>
+          </a:prstGeom>
+          <a:noFill/>
+          <a:ln/>
+        </p:spPr>
+        <p:txBody>
+          <a:bodyPr wrap="square" lIns="0" tIns="0" rIns="0" bIns="0" rtlCol="0" anchor="ctr"/>
+          <a:lstStyle/>
+          <a:p>
+            <a:pPr indent="0" marL="0">
+              <a:buNone/>
+            </a:pPr>
+            <a:r>
+              <a:rPr lang="en-US" sz="1000" b="1" spc="300" kern="0" dirty="0">
                 <a:solidFill>
                   <a:srgbClr val="0B3D4F"/>
                 </a:solidFill>
@@ -19469,36 +19481,36 @@
               </a:rPr>
               <a:t>司 法 管 辖</a:t>
             </a:r>
-            <a:endParaRPr lang="en-US" sz="1100" dirty="0"/>
-          </a:p>
-        </p:txBody>
-      </p:sp>
-      <p:sp>
-        <p:nvSpPr>
-          <p:cNvPr id="23" name="Text 21"/>
-          <p:cNvSpPr/>
-          <p:nvPr/>
-        </p:nvSpPr>
-        <p:spPr>
-          <a:xfrm>
-            <a:off x="6629400" y="4544568"/>
-            <a:ext cx="2286000" cy="365760"/>
-          </a:xfrm>
-          <a:prstGeom prst="rect">
-            <a:avLst/>
-          </a:prstGeom>
-          <a:noFill/>
-          <a:ln/>
-        </p:spPr>
-        <p:txBody>
-          <a:bodyPr wrap="square" lIns="0" tIns="0" rIns="0" bIns="0" rtlCol="0" anchor="ctr"/>
-          <a:lstStyle/>
-          <a:p>
-            <a:pPr indent="0" marL="0">
-              <a:buNone/>
-            </a:pPr>
-            <a:r>
-              <a:rPr lang="en-US" sz="1200" b="1" dirty="0">
+            <a:endParaRPr lang="en-US" sz="1000" dirty="0"/>
+          </a:p>
+        </p:txBody>
+      </p:sp>
+      <p:sp>
+        <p:nvSpPr>
+          <p:cNvPr id="21" name="Text 19"/>
+          <p:cNvSpPr/>
+          <p:nvPr/>
+        </p:nvSpPr>
+        <p:spPr>
+          <a:xfrm>
+            <a:off x="6556248" y="4261104"/>
+            <a:ext cx="2066544" cy="365760"/>
+          </a:xfrm>
+          <a:prstGeom prst="rect">
+            <a:avLst/>
+          </a:prstGeom>
+          <a:noFill/>
+          <a:ln/>
+        </p:spPr>
+        <p:txBody>
+          <a:bodyPr wrap="square" lIns="0" tIns="0" rIns="0" bIns="0" rtlCol="0" anchor="ctr"/>
+          <a:lstStyle/>
+          <a:p>
+            <a:pPr indent="0" marL="0">
+              <a:buNone/>
+            </a:pPr>
+            <a:r>
+              <a:rPr lang="en-US" sz="1100" b="1" dirty="0">
                 <a:solidFill>
                   <a:srgbClr val="141414"/>
                 </a:solidFill>
@@ -19508,26 +19520,26 @@
               </a:rPr>
               <a:t>上海人民法院</a:t>
             </a:r>
-            <a:endParaRPr lang="en-US" sz="1200" dirty="0"/>
-          </a:p>
-        </p:txBody>
-      </p:sp>
-      <p:sp>
-        <p:nvSpPr>
-          <p:cNvPr id="24" name="Shape 22"/>
-          <p:cNvSpPr/>
-          <p:nvPr/>
-        </p:nvSpPr>
-        <p:spPr>
-          <a:xfrm flipV="1">
-            <a:off x="3794760" y="3810762"/>
-            <a:ext cx="2697480" cy="761238"/>
+            <a:endParaRPr lang="en-US" sz="1100" dirty="0"/>
+          </a:p>
+        </p:txBody>
+      </p:sp>
+      <p:sp>
+        <p:nvSpPr>
+          <p:cNvPr id="22" name="Shape 20"/>
+          <p:cNvSpPr/>
+          <p:nvPr/>
+        </p:nvSpPr>
+        <p:spPr>
+          <a:xfrm>
+            <a:off x="2697480" y="2468880"/>
+            <a:ext cx="2373782" cy="557784"/>
           </a:xfrm>
           <a:prstGeom prst="line">
             <a:avLst/>
           </a:prstGeom>
           <a:noFill/>
-          <a:ln w="12700">
+          <a:ln w="9525">
             <a:solidFill>
               <a:srgbClr val="BDB39A"/>
             </a:solidFill>
@@ -19537,66 +19549,76 @@
       </p:sp>
       <p:sp>
         <p:nvSpPr>
+          <p:cNvPr id="23" name="Shape 21"/>
+          <p:cNvSpPr/>
+          <p:nvPr/>
+        </p:nvSpPr>
+        <p:spPr>
+          <a:xfrm flipV="1">
+            <a:off x="4072738" y="2468880"/>
+            <a:ext cx="2373782" cy="557784"/>
+          </a:xfrm>
+          <a:prstGeom prst="line">
+            <a:avLst/>
+          </a:prstGeom>
+          <a:noFill/>
+          <a:ln w="9525">
+            <a:solidFill>
+              <a:srgbClr val="BDB39A"/>
+            </a:solidFill>
+            <a:prstDash val="dash"/>
+          </a:ln>
+        </p:spPr>
+      </p:sp>
+      <p:sp>
+        <p:nvSpPr>
+          <p:cNvPr id="24" name="Shape 22"/>
+          <p:cNvSpPr/>
+          <p:nvPr/>
+        </p:nvSpPr>
+        <p:spPr>
+          <a:xfrm flipV="1">
+            <a:off x="2697480" y="3739896"/>
+            <a:ext cx="2373782" cy="557784"/>
+          </a:xfrm>
+          <a:prstGeom prst="line">
+            <a:avLst/>
+          </a:prstGeom>
+          <a:noFill/>
+          <a:ln w="9525">
+            <a:solidFill>
+              <a:srgbClr val="BDB39A"/>
+            </a:solidFill>
+            <a:prstDash val="dash"/>
+          </a:ln>
+        </p:spPr>
+      </p:sp>
+      <p:sp>
+        <p:nvSpPr>
           <p:cNvPr id="25" name="Shape 23"/>
           <p:cNvSpPr/>
           <p:nvPr/>
         </p:nvSpPr>
         <p:spPr>
           <a:xfrm>
-            <a:off x="365760" y="4389120"/>
-            <a:ext cx="8412480" cy="365760"/>
-          </a:xfrm>
-          <a:prstGeom prst="rect">
-            <a:avLst/>
-          </a:prstGeom>
-          <a:solidFill>
-            <a:srgbClr val="ECE7D7"/>
-          </a:solidFill>
-          <a:ln/>
+            <a:off x="4072738" y="3739896"/>
+            <a:ext cx="2373782" cy="557784"/>
+          </a:xfrm>
+          <a:prstGeom prst="line">
+            <a:avLst/>
+          </a:prstGeom>
+          <a:noFill/>
+          <a:ln w="9525">
+            <a:solidFill>
+              <a:srgbClr val="BDB39A"/>
+            </a:solidFill>
+            <a:prstDash val="dash"/>
+          </a:ln>
         </p:spPr>
       </p:sp>
       <p:sp>
         <p:nvSpPr>
           <p:cNvPr id="26" name="Text 24"/>
-          <p:cNvSpPr/>
-          <p:nvPr/>
-        </p:nvSpPr>
-        <p:spPr>
-          <a:xfrm>
-            <a:off x="548640" y="4434840"/>
-            <a:ext cx="8046720" cy="274320"/>
-          </a:xfrm>
-          <a:prstGeom prst="rect">
-            <a:avLst/>
-          </a:prstGeom>
-          <a:noFill/>
-          <a:ln/>
-        </p:spPr>
-        <p:txBody>
-          <a:bodyPr wrap="square" lIns="0" tIns="0" rIns="0" bIns="0" rtlCol="0" anchor="ctr"/>
-          <a:lstStyle/>
-          <a:p>
-            <a:pPr indent="0" marL="0">
-              <a:buNone/>
-            </a:pPr>
-            <a:r>
-              <a:rPr lang="en-US" sz="1200" b="1" dirty="0">
-                <a:solidFill>
-                  <a:srgbClr val="141414"/>
-                </a:solidFill>
-                <a:latin typeface="Songti SC" pitchFamily="34" charset="0"/>
-                <a:ea typeface="Songti SC" pitchFamily="34" charset="-122"/>
-                <a:cs typeface="Songti SC" pitchFamily="34" charset="-120"/>
-              </a:rPr>
-              <a:t>行业里几乎所有同行至少缺一环——4 件事一件不缺，是非常稀缺的。</a:t>
-            </a:r>
-            <a:endParaRPr lang="en-US" sz="1200" dirty="0"/>
-          </a:p>
-        </p:txBody>
-      </p:sp>
-      <p:sp>
-        <p:nvSpPr>
-          <p:cNvPr id="27" name="Text 25"/>
           <p:cNvSpPr/>
           <p:nvPr/>
         </p:nvSpPr>
@@ -19635,7 +19657,7 @@
       </p:sp>
       <p:sp>
         <p:nvSpPr>
-          <p:cNvPr id="28" name="Text 26"/>
+          <p:cNvPr id="27" name="Text 25"/>
           <p:cNvSpPr/>
           <p:nvPr/>
         </p:nvSpPr>
@@ -19891,8 +19913,8 @@
         </p:nvSpPr>
         <p:spPr>
           <a:xfrm>
-            <a:off x="365760" y="2194560"/>
-            <a:ext cx="2011680" cy="2377440"/>
+            <a:off x="365760" y="2103120"/>
+            <a:ext cx="2011680" cy="2240280"/>
           </a:xfrm>
           <a:prstGeom prst="rect">
             <a:avLst/>
@@ -19916,7 +19938,7 @@
         </p:nvSpPr>
         <p:spPr>
           <a:xfrm>
-            <a:off x="365760" y="2194560"/>
+            <a:off x="365760" y="2103120"/>
             <a:ext cx="2011680" cy="54864"/>
           </a:xfrm>
           <a:prstGeom prst="rect">
@@ -19936,24 +19958,24 @@
         </p:nvSpPr>
         <p:spPr>
           <a:xfrm>
-            <a:off x="548640" y="2377440"/>
-            <a:ext cx="914400" cy="594360"/>
-          </a:xfrm>
-          <a:prstGeom prst="rect">
-            <a:avLst/>
-          </a:prstGeom>
-          <a:noFill/>
-          <a:ln/>
-        </p:spPr>
-        <p:txBody>
-          <a:bodyPr wrap="square" lIns="0" tIns="0" rIns="0" bIns="0" rtlCol="0" anchor="ctr"/>
-          <a:lstStyle/>
-          <a:p>
-            <a:pPr indent="0" marL="0">
-              <a:buNone/>
-            </a:pPr>
-            <a:r>
-              <a:rPr lang="en-US" sz="4400" b="1" dirty="0">
+            <a:off x="548640" y="2267712"/>
+            <a:ext cx="914400" cy="548640"/>
+          </a:xfrm>
+          <a:prstGeom prst="rect">
+            <a:avLst/>
+          </a:prstGeom>
+          <a:noFill/>
+          <a:ln/>
+        </p:spPr>
+        <p:txBody>
+          <a:bodyPr wrap="square" lIns="0" tIns="0" rIns="0" bIns="0" rtlCol="0" anchor="ctr"/>
+          <a:lstStyle/>
+          <a:p>
+            <a:pPr indent="0" marL="0">
+              <a:buNone/>
+            </a:pPr>
+            <a:r>
+              <a:rPr lang="en-US" sz="4000" b="1" dirty="0">
                 <a:solidFill>
                   <a:srgbClr val="BDB39A"/>
                 </a:solidFill>
@@ -19963,7 +19985,7 @@
               </a:rPr>
               <a:t>壹</a:t>
             </a:r>
-            <a:endParaRPr lang="en-US" sz="4400" dirty="0"/>
+            <a:endParaRPr lang="en-US" sz="4000" dirty="0"/>
           </a:p>
         </p:txBody>
       </p:sp>
@@ -19975,7 +19997,7 @@
         </p:nvSpPr>
         <p:spPr>
           <a:xfrm>
-            <a:off x="548640" y="3063240"/>
+            <a:off x="548640" y="2880360"/>
             <a:ext cx="1645920" cy="320040"/>
           </a:xfrm>
           <a:prstGeom prst="rect">
@@ -19992,7 +20014,7 @@
               <a:buNone/>
             </a:pPr>
             <a:r>
-              <a:rPr lang="en-US" sz="1800" b="1" dirty="0">
+              <a:rPr lang="en-US" sz="1600" b="1" dirty="0">
                 <a:solidFill>
                   <a:srgbClr val="141414"/>
                 </a:solidFill>
@@ -20002,7 +20024,7 @@
               </a:rPr>
               <a:t>价格上墙</a:t>
             </a:r>
-            <a:endParaRPr lang="en-US" sz="1800" dirty="0"/>
+            <a:endParaRPr lang="en-US" sz="1600" dirty="0"/>
           </a:p>
         </p:txBody>
       </p:sp>
@@ -20014,7 +20036,7 @@
         </p:nvSpPr>
         <p:spPr>
           <a:xfrm>
-            <a:off x="548640" y="3383280"/>
+            <a:off x="548640" y="3200400"/>
             <a:ext cx="1645920" cy="228600"/>
           </a:xfrm>
           <a:prstGeom prst="rect">
@@ -20053,8 +20075,8 @@
         </p:nvSpPr>
         <p:spPr>
           <a:xfrm>
-            <a:off x="548640" y="3657600"/>
-            <a:ext cx="1645920" cy="868680"/>
+            <a:off x="548640" y="3474720"/>
+            <a:ext cx="1645920" cy="822960"/>
           </a:xfrm>
           <a:prstGeom prst="rect">
             <a:avLst/>
@@ -20092,8 +20114,8 @@
         </p:nvSpPr>
         <p:spPr>
           <a:xfrm>
-            <a:off x="2496312" y="2194560"/>
-            <a:ext cx="2011680" cy="2377440"/>
+            <a:off x="2496312" y="2103120"/>
+            <a:ext cx="2011680" cy="2240280"/>
           </a:xfrm>
           <a:prstGeom prst="rect">
             <a:avLst/>
@@ -20117,7 +20139,7 @@
         </p:nvSpPr>
         <p:spPr>
           <a:xfrm>
-            <a:off x="2496312" y="2194560"/>
+            <a:off x="2496312" y="2103120"/>
             <a:ext cx="2011680" cy="54864"/>
           </a:xfrm>
           <a:prstGeom prst="rect">
@@ -20137,24 +20159,24 @@
         </p:nvSpPr>
         <p:spPr>
           <a:xfrm>
-            <a:off x="2679192" y="2377440"/>
-            <a:ext cx="914400" cy="594360"/>
-          </a:xfrm>
-          <a:prstGeom prst="rect">
-            <a:avLst/>
-          </a:prstGeom>
-          <a:noFill/>
-          <a:ln/>
-        </p:spPr>
-        <p:txBody>
-          <a:bodyPr wrap="square" lIns="0" tIns="0" rIns="0" bIns="0" rtlCol="0" anchor="ctr"/>
-          <a:lstStyle/>
-          <a:p>
-            <a:pPr indent="0" marL="0">
-              <a:buNone/>
-            </a:pPr>
-            <a:r>
-              <a:rPr lang="en-US" sz="4400" b="1" dirty="0">
+            <a:off x="2679192" y="2267712"/>
+            <a:ext cx="914400" cy="548640"/>
+          </a:xfrm>
+          <a:prstGeom prst="rect">
+            <a:avLst/>
+          </a:prstGeom>
+          <a:noFill/>
+          <a:ln/>
+        </p:spPr>
+        <p:txBody>
+          <a:bodyPr wrap="square" lIns="0" tIns="0" rIns="0" bIns="0" rtlCol="0" anchor="ctr"/>
+          <a:lstStyle/>
+          <a:p>
+            <a:pPr indent="0" marL="0">
+              <a:buNone/>
+            </a:pPr>
+            <a:r>
+              <a:rPr lang="en-US" sz="4000" b="1" dirty="0">
                 <a:solidFill>
                   <a:srgbClr val="BDB39A"/>
                 </a:solidFill>
@@ -20164,7 +20186,7 @@
               </a:rPr>
               <a:t>贰</a:t>
             </a:r>
-            <a:endParaRPr lang="en-US" sz="4400" dirty="0"/>
+            <a:endParaRPr lang="en-US" sz="4000" dirty="0"/>
           </a:p>
         </p:txBody>
       </p:sp>
@@ -20176,7 +20198,7 @@
         </p:nvSpPr>
         <p:spPr>
           <a:xfrm>
-            <a:off x="2679192" y="3063240"/>
+            <a:off x="2679192" y="2880360"/>
             <a:ext cx="1645920" cy="320040"/>
           </a:xfrm>
           <a:prstGeom prst="rect">
@@ -20193,7 +20215,7 @@
               <a:buNone/>
             </a:pPr>
             <a:r>
-              <a:rPr lang="en-US" sz="1800" b="1" dirty="0">
+              <a:rPr lang="en-US" sz="1600" b="1" dirty="0">
                 <a:solidFill>
                   <a:srgbClr val="141414"/>
                 </a:solidFill>
@@ -20203,7 +20225,7 @@
               </a:rPr>
               <a:t>POA 100% 原创</a:t>
             </a:r>
-            <a:endParaRPr lang="en-US" sz="1800" dirty="0"/>
+            <a:endParaRPr lang="en-US" sz="1600" dirty="0"/>
           </a:p>
         </p:txBody>
       </p:sp>
@@ -20215,7 +20237,7 @@
         </p:nvSpPr>
         <p:spPr>
           <a:xfrm>
-            <a:off x="2679192" y="3383280"/>
+            <a:off x="2679192" y="3200400"/>
             <a:ext cx="1645920" cy="228600"/>
           </a:xfrm>
           <a:prstGeom prst="rect">
@@ -20254,8 +20276,8 @@
         </p:nvSpPr>
         <p:spPr>
           <a:xfrm>
-            <a:off x="2679192" y="3657600"/>
-            <a:ext cx="1645920" cy="868680"/>
+            <a:off x="2679192" y="3474720"/>
+            <a:ext cx="1645920" cy="822960"/>
           </a:xfrm>
           <a:prstGeom prst="rect">
             <a:avLst/>
@@ -20293,8 +20315,8 @@
         </p:nvSpPr>
         <p:spPr>
           <a:xfrm>
-            <a:off x="4626864" y="2194560"/>
-            <a:ext cx="2011680" cy="2377440"/>
+            <a:off x="4626864" y="2103120"/>
+            <a:ext cx="2011680" cy="2240280"/>
           </a:xfrm>
           <a:prstGeom prst="rect">
             <a:avLst/>
@@ -20318,7 +20340,7 @@
         </p:nvSpPr>
         <p:spPr>
           <a:xfrm>
-            <a:off x="4626864" y="2194560"/>
+            <a:off x="4626864" y="2103120"/>
             <a:ext cx="2011680" cy="54864"/>
           </a:xfrm>
           <a:prstGeom prst="rect">
@@ -20338,24 +20360,24 @@
         </p:nvSpPr>
         <p:spPr>
           <a:xfrm>
-            <a:off x="4809744" y="2377440"/>
-            <a:ext cx="914400" cy="594360"/>
-          </a:xfrm>
-          <a:prstGeom prst="rect">
-            <a:avLst/>
-          </a:prstGeom>
-          <a:noFill/>
-          <a:ln/>
-        </p:spPr>
-        <p:txBody>
-          <a:bodyPr wrap="square" lIns="0" tIns="0" rIns="0" bIns="0" rtlCol="0" anchor="ctr"/>
-          <a:lstStyle/>
-          <a:p>
-            <a:pPr indent="0" marL="0">
-              <a:buNone/>
-            </a:pPr>
-            <a:r>
-              <a:rPr lang="en-US" sz="4400" b="1" dirty="0">
+            <a:off x="4809744" y="2267712"/>
+            <a:ext cx="914400" cy="548640"/>
+          </a:xfrm>
+          <a:prstGeom prst="rect">
+            <a:avLst/>
+          </a:prstGeom>
+          <a:noFill/>
+          <a:ln/>
+        </p:spPr>
+        <p:txBody>
+          <a:bodyPr wrap="square" lIns="0" tIns="0" rIns="0" bIns="0" rtlCol="0" anchor="ctr"/>
+          <a:lstStyle/>
+          <a:p>
+            <a:pPr indent="0" marL="0">
+              <a:buNone/>
+            </a:pPr>
+            <a:r>
+              <a:rPr lang="en-US" sz="4000" b="1" dirty="0">
                 <a:solidFill>
                   <a:srgbClr val="BDB39A"/>
                 </a:solidFill>
@@ -20365,7 +20387,7 @@
               </a:rPr>
               <a:t>叁</a:t>
             </a:r>
-            <a:endParaRPr lang="en-US" sz="4400" dirty="0"/>
+            <a:endParaRPr lang="en-US" sz="4000" dirty="0"/>
           </a:p>
         </p:txBody>
       </p:sp>
@@ -20377,7 +20399,7 @@
         </p:nvSpPr>
         <p:spPr>
           <a:xfrm>
-            <a:off x="4809744" y="3063240"/>
+            <a:off x="4809744" y="2880360"/>
             <a:ext cx="1645920" cy="320040"/>
           </a:xfrm>
           <a:prstGeom prst="rect">
@@ -20394,7 +20416,7 @@
               <a:buNone/>
             </a:pPr>
             <a:r>
-              <a:rPr lang="en-US" sz="1800" b="1" dirty="0">
+              <a:rPr lang="en-US" sz="1600" b="1" dirty="0">
                 <a:solidFill>
                   <a:srgbClr val="141414"/>
                 </a:solidFill>
@@ -20404,7 +20426,7 @@
               </a:rPr>
               <a:t>看板留痕</a:t>
             </a:r>
-            <a:endParaRPr lang="en-US" sz="1800" dirty="0"/>
+            <a:endParaRPr lang="en-US" sz="1600" dirty="0"/>
           </a:p>
         </p:txBody>
       </p:sp>
@@ -20416,7 +20438,7 @@
         </p:nvSpPr>
         <p:spPr>
           <a:xfrm>
-            <a:off x="4809744" y="3383280"/>
+            <a:off x="4809744" y="3200400"/>
             <a:ext cx="1645920" cy="228600"/>
           </a:xfrm>
           <a:prstGeom prst="rect">
@@ -20455,8 +20477,8 @@
         </p:nvSpPr>
         <p:spPr>
           <a:xfrm>
-            <a:off x="4809744" y="3657600"/>
-            <a:ext cx="1645920" cy="868680"/>
+            <a:off x="4809744" y="3474720"/>
+            <a:ext cx="1645920" cy="822960"/>
           </a:xfrm>
           <a:prstGeom prst="rect">
             <a:avLst/>
@@ -20494,8 +20516,8 @@
         </p:nvSpPr>
         <p:spPr>
           <a:xfrm>
-            <a:off x="6757416" y="2194560"/>
-            <a:ext cx="2011680" cy="2377440"/>
+            <a:off x="6757416" y="2103120"/>
+            <a:ext cx="2011680" cy="2240280"/>
           </a:xfrm>
           <a:prstGeom prst="rect">
             <a:avLst/>
@@ -20519,7 +20541,7 @@
         </p:nvSpPr>
         <p:spPr>
           <a:xfrm>
-            <a:off x="6757416" y="2194560"/>
+            <a:off x="6757416" y="2103120"/>
             <a:ext cx="2011680" cy="54864"/>
           </a:xfrm>
           <a:prstGeom prst="rect">
@@ -20539,24 +20561,24 @@
         </p:nvSpPr>
         <p:spPr>
           <a:xfrm>
-            <a:off x="6940296" y="2377440"/>
-            <a:ext cx="914400" cy="594360"/>
-          </a:xfrm>
-          <a:prstGeom prst="rect">
-            <a:avLst/>
-          </a:prstGeom>
-          <a:noFill/>
-          <a:ln/>
-        </p:spPr>
-        <p:txBody>
-          <a:bodyPr wrap="square" lIns="0" tIns="0" rIns="0" bIns="0" rtlCol="0" anchor="ctr"/>
-          <a:lstStyle/>
-          <a:p>
-            <a:pPr indent="0" marL="0">
-              <a:buNone/>
-            </a:pPr>
-            <a:r>
-              <a:rPr lang="en-US" sz="4400" b="1" dirty="0">
+            <a:off x="6940296" y="2267712"/>
+            <a:ext cx="914400" cy="548640"/>
+          </a:xfrm>
+          <a:prstGeom prst="rect">
+            <a:avLst/>
+          </a:prstGeom>
+          <a:noFill/>
+          <a:ln/>
+        </p:spPr>
+        <p:txBody>
+          <a:bodyPr wrap="square" lIns="0" tIns="0" rIns="0" bIns="0" rtlCol="0" anchor="ctr"/>
+          <a:lstStyle/>
+          <a:p>
+            <a:pPr indent="0" marL="0">
+              <a:buNone/>
+            </a:pPr>
+            <a:r>
+              <a:rPr lang="en-US" sz="4000" b="1" dirty="0">
                 <a:solidFill>
                   <a:srgbClr val="BDB39A"/>
                 </a:solidFill>
@@ -20566,7 +20588,7 @@
               </a:rPr>
               <a:t>肆</a:t>
             </a:r>
-            <a:endParaRPr lang="en-US" sz="4400" dirty="0"/>
+            <a:endParaRPr lang="en-US" sz="4000" dirty="0"/>
           </a:p>
         </p:txBody>
       </p:sp>
@@ -20578,7 +20600,7 @@
         </p:nvSpPr>
         <p:spPr>
           <a:xfrm>
-            <a:off x="6940296" y="3063240"/>
+            <a:off x="6940296" y="2880360"/>
             <a:ext cx="1645920" cy="320040"/>
           </a:xfrm>
           <a:prstGeom prst="rect">
@@ -20595,7 +20617,7 @@
               <a:buNone/>
             </a:pPr>
             <a:r>
-              <a:rPr lang="en-US" sz="1800" b="1" dirty="0">
+              <a:rPr lang="en-US" sz="1600" b="1" dirty="0">
                 <a:solidFill>
                   <a:srgbClr val="141414"/>
                 </a:solidFill>
@@ -20605,7 +20627,7 @@
               </a:rPr>
               <a:t>退款明写</a:t>
             </a:r>
-            <a:endParaRPr lang="en-US" sz="1800" dirty="0"/>
+            <a:endParaRPr lang="en-US" sz="1600" dirty="0"/>
           </a:p>
         </p:txBody>
       </p:sp>
@@ -20617,7 +20639,7 @@
         </p:nvSpPr>
         <p:spPr>
           <a:xfrm>
-            <a:off x="6940296" y="3383280"/>
+            <a:off x="6940296" y="3200400"/>
             <a:ext cx="1645920" cy="228600"/>
           </a:xfrm>
           <a:prstGeom prst="rect">
@@ -20656,8 +20678,8 @@
         </p:nvSpPr>
         <p:spPr>
           <a:xfrm>
-            <a:off x="6940296" y="3657600"/>
-            <a:ext cx="1645920" cy="868680"/>
+            <a:off x="6940296" y="3474720"/>
+            <a:ext cx="1645920" cy="822960"/>
           </a:xfrm>
           <a:prstGeom prst="rect">
             <a:avLst/>
@@ -20695,7 +20717,7 @@
         </p:nvSpPr>
         <p:spPr>
           <a:xfrm>
-            <a:off x="365760" y="4663440"/>
+            <a:off x="365760" y="4480560"/>
             <a:ext cx="8412480" cy="274320"/>
           </a:xfrm>
           <a:prstGeom prst="rect">
@@ -20712,7 +20734,7 @@
               <a:buNone/>
             </a:pPr>
             <a:r>
-              <a:rPr lang="en-US" sz="1200" b="1" i="1" dirty="0">
+              <a:rPr lang="en-US" sz="1200" b="1" dirty="0">
                 <a:solidFill>
                   <a:srgbClr val="A52A2A"/>
                 </a:solidFill>
@@ -22091,8 +22113,8 @@
         </p:nvSpPr>
         <p:spPr>
           <a:xfrm>
-            <a:off x="365760" y="4663440"/>
-            <a:ext cx="8412480" cy="274320"/>
+            <a:off x="365760" y="4526280"/>
+            <a:ext cx="8412480" cy="228600"/>
           </a:xfrm>
           <a:prstGeom prst="rect">
             <a:avLst/>
